--- a/dist/초3/수학/분수와소수/초3_수학_분수와소수_04_묶음을분수로_학생용.pptx
+++ b/dist/초3/수학/분수와소수/초3_수학_분수와소수_04_묶음을분수로_학생용.pptx
@@ -118,44 +118,44 @@
   <p:extLst>
     <p:ext uri="{521415D9-36F7-43E2-AB2F-B90AF26B5E84}">
       <p14:sectionLst xmlns:p14="http://schemas.microsoft.com/office/powerpoint/2010/main">
-        <p14:section name="도입" id="{d5a74395-f56e-e628-322a-4fd635a4cd3d}">
+        <p14:section name="도입" id="{37590afc-9776-8584-9984-17750a2a3a49}">
           <p14:sldIdLst>
             <p14:sldId id="256"/>
             <p14:sldId id="257"/>
           </p14:sldIdLst>
         </p14:section>
-        <p14:section name="개념" id="{51a169ca-fd1f-1a8d-7e80-df3be17defae}">
+        <p14:section name="개념" id="{9ae7c460-b5f9-ebfb-472b-36abdba1073a}">
           <p14:sldIdLst>
             <p14:sldId id="258"/>
             <p14:sldId id="259"/>
             <p14:sldId id="262"/>
           </p14:sldIdLst>
         </p14:section>
-        <p14:section name="연습" id="{474ced00-c81f-1cca-9886-1f5b14f2edcb}">
+        <p14:section name="연습" id="{fc2251f1-f09f-679c-6890-ed20f85ef969}">
           <p14:sldIdLst>
             <p14:sldId id="260"/>
             <p14:sldId id="261"/>
             <p14:sldId id="263"/>
           </p14:sldIdLst>
         </p14:section>
-        <p14:section name="개념" id="{a081e09f-adaa-a1fc-16d1-5c2a377f2413}">
+        <p14:section name="개념" id="{dfd2b1f1-e6a3-a524-b832-92c890dd463d}">
           <p14:sldIdLst/>
         </p14:section>
-        <p14:section name="연습" id="{9e64a673-05d4-5703-1b72-5d0b60b8b6f5}">
+        <p14:section name="연습" id="{76f2afaf-98c3-c124-4591-5dad65d1d6c7}">
           <p14:sldIdLst/>
         </p14:section>
-        <p14:section name="확인" id="{6c9cbfb4-cb65-6dd1-186d-23071e65680d}">
+        <p14:section name="확인" id="{603342f0-5614-b504-b1eb-bb62f6a83ae3}">
           <p14:sldIdLst>
             <p14:sldId id="264"/>
             <p14:sldId id="265"/>
           </p14:sldIdLst>
         </p14:section>
-        <p14:section name="정리" id="{0550e8dd-0d2c-eb69-2c7e-b19f9ea8ca46}">
+        <p14:section name="정리" id="{e6ae6f60-d6f5-f0cb-1951-f62721024d47}">
           <p14:sldIdLst>
             <p14:sldId id="266"/>
           </p14:sldIdLst>
         </p14:section>
-        <p14:section name="보충" id="{56854d39-64f3-ecff-7156-b491b5245f5b}">
+        <p14:section name="보충" id="{53380311-001b-a173-adce-aff9e3dae5ff}">
           <p14:sldIdLst>
             <p14:sldId id="267"/>
           </p14:sldIdLst>

--- a/dist/초3/수학/분수와소수/초3_수학_분수와소수_04_묶음을분수로_학생용.pptx
+++ b/dist/초3/수학/분수와소수/초3_수학_분수와소수_04_묶음을분수로_학생용.pptx
@@ -118,44 +118,44 @@
   <p:extLst>
     <p:ext uri="{521415D9-36F7-43E2-AB2F-B90AF26B5E84}">
       <p14:sectionLst xmlns:p14="http://schemas.microsoft.com/office/powerpoint/2010/main">
-        <p14:section name="도입" id="{37590afc-9776-8584-9984-17750a2a3a49}">
+        <p14:section name="도입" id="{9c019ba4-4201-0205-8ddd-4fb645f13358}">
           <p14:sldIdLst>
             <p14:sldId id="256"/>
             <p14:sldId id="257"/>
           </p14:sldIdLst>
         </p14:section>
-        <p14:section name="개념" id="{9ae7c460-b5f9-ebfb-472b-36abdba1073a}">
+        <p14:section name="개념" id="{b2fe34fa-af43-9011-87f6-f9394867176b}">
           <p14:sldIdLst>
             <p14:sldId id="258"/>
             <p14:sldId id="259"/>
             <p14:sldId id="262"/>
           </p14:sldIdLst>
         </p14:section>
-        <p14:section name="연습" id="{fc2251f1-f09f-679c-6890-ed20f85ef969}">
+        <p14:section name="연습" id="{a05fe063-82ed-6ffe-3d10-fe8cc6857c37}">
           <p14:sldIdLst>
             <p14:sldId id="260"/>
             <p14:sldId id="261"/>
             <p14:sldId id="263"/>
           </p14:sldIdLst>
         </p14:section>
-        <p14:section name="개념" id="{dfd2b1f1-e6a3-a524-b832-92c890dd463d}">
+        <p14:section name="개념" id="{a94cf680-1a27-cd41-6b0d-1a69281b6940}">
           <p14:sldIdLst/>
         </p14:section>
-        <p14:section name="연습" id="{76f2afaf-98c3-c124-4591-5dad65d1d6c7}">
+        <p14:section name="연습" id="{e5e9935d-b506-5df7-b3b4-244349fe7c70}">
           <p14:sldIdLst/>
         </p14:section>
-        <p14:section name="확인" id="{603342f0-5614-b504-b1eb-bb62f6a83ae3}">
+        <p14:section name="확인" id="{c1036004-fe99-dcf2-357a-934c789d3f9d}">
           <p14:sldIdLst>
             <p14:sldId id="264"/>
             <p14:sldId id="265"/>
           </p14:sldIdLst>
         </p14:section>
-        <p14:section name="정리" id="{e6ae6f60-d6f5-f0cb-1951-f62721024d47}">
+        <p14:section name="정리" id="{19fa8b77-216a-ca2e-0bc9-422fdadaeaf8}">
           <p14:sldIdLst>
             <p14:sldId id="266"/>
           </p14:sldIdLst>
         </p14:section>
-        <p14:section name="보충" id="{53380311-001b-a173-adce-aff9e3dae5ff}">
+        <p14:section name="보충" id="{7eba4f26-c948-99c9-cfb3-4547bd43cb0a}">
           <p14:sldIdLst>
             <p14:sldId id="267"/>
           </p14:sldIdLst>
@@ -4053,7 +4053,7 @@
         <p:spPr>
           <a:xfrm>
             <a:off x="5011420" y="4237228"/>
-            <a:ext cx="1002284" cy="852424"/>
+            <a:ext cx="1015492" cy="852424"/>
           </a:xfrm>
           <a:prstGeom prst="rect">
             <a:avLst/>
@@ -4091,7 +4091,7 @@
         </p:nvSpPr>
         <p:spPr>
           <a:xfrm>
-            <a:off x="6123432" y="4237228"/>
+            <a:off x="6136640" y="4237228"/>
             <a:ext cx="456438" cy="389636"/>
           </a:xfrm>
           <a:prstGeom prst="rect">
@@ -4130,7 +4130,7 @@
         </p:nvSpPr>
         <p:spPr>
           <a:xfrm>
-            <a:off x="6160008" y="4663440"/>
+            <a:off x="6173216" y="4663440"/>
             <a:ext cx="383286" cy="0"/>
           </a:xfrm>
           <a:prstGeom prst="line">
@@ -4153,7 +4153,7 @@
         </p:nvSpPr>
         <p:spPr>
           <a:xfrm>
-            <a:off x="6123432" y="4700016"/>
+            <a:off x="6136640" y="4700016"/>
             <a:ext cx="456438" cy="389636"/>
           </a:xfrm>
           <a:prstGeom prst="rect">
@@ -4192,7 +4192,7 @@
         </p:nvSpPr>
         <p:spPr>
           <a:xfrm>
-            <a:off x="6689598" y="4237228"/>
+            <a:off x="6702806" y="4237228"/>
             <a:ext cx="394716" cy="852424"/>
           </a:xfrm>
           <a:prstGeom prst="rect">
@@ -4231,7 +4231,7 @@
         </p:nvSpPr>
         <p:spPr>
           <a:xfrm>
-            <a:off x="7339691" y="4519275"/>
+            <a:off x="7352899" y="4519275"/>
             <a:ext cx="288331" cy="288331"/>
           </a:xfrm>
           <a:prstGeom prst="rect">
@@ -4296,7 +4296,7 @@
         <p:spPr>
           <a:xfrm>
             <a:off x="8784844" y="4237228"/>
-            <a:ext cx="1002284" cy="852424"/>
+            <a:ext cx="1015492" cy="852424"/>
           </a:xfrm>
           <a:prstGeom prst="rect">
             <a:avLst/>
@@ -4334,7 +4334,7 @@
         </p:nvSpPr>
         <p:spPr>
           <a:xfrm>
-            <a:off x="9896856" y="4237228"/>
+            <a:off x="9910064" y="4237228"/>
             <a:ext cx="456438" cy="389636"/>
           </a:xfrm>
           <a:prstGeom prst="rect">
@@ -4373,7 +4373,7 @@
         </p:nvSpPr>
         <p:spPr>
           <a:xfrm>
-            <a:off x="9933432" y="4663440"/>
+            <a:off x="9946640" y="4663440"/>
             <a:ext cx="383286" cy="0"/>
           </a:xfrm>
           <a:prstGeom prst="line">
@@ -4396,7 +4396,7 @@
         </p:nvSpPr>
         <p:spPr>
           <a:xfrm>
-            <a:off x="9896856" y="4700016"/>
+            <a:off x="9910064" y="4700016"/>
             <a:ext cx="456438" cy="389636"/>
           </a:xfrm>
           <a:prstGeom prst="rect">
@@ -4435,7 +4435,7 @@
         </p:nvSpPr>
         <p:spPr>
           <a:xfrm>
-            <a:off x="10463022" y="4237228"/>
+            <a:off x="10476230" y="4237228"/>
             <a:ext cx="394716" cy="852424"/>
           </a:xfrm>
           <a:prstGeom prst="rect">
@@ -4474,7 +4474,7 @@
         </p:nvSpPr>
         <p:spPr>
           <a:xfrm>
-            <a:off x="11113115" y="4519275"/>
+            <a:off x="11126323" y="4519275"/>
             <a:ext cx="288331" cy="288331"/>
           </a:xfrm>
           <a:prstGeom prst="rect">
@@ -11669,7 +11669,7 @@
         <p:spPr>
           <a:xfrm>
             <a:off x="548640" y="1351280"/>
-            <a:ext cx="1231900" cy="1092200"/>
+            <a:ext cx="1249172" cy="1092200"/>
           </a:xfrm>
           <a:prstGeom prst="rect">
             <a:avLst/>
@@ -11707,7 +11707,7 @@
         </p:nvSpPr>
         <p:spPr>
           <a:xfrm>
-            <a:off x="1890268" y="1351280"/>
+            <a:off x="1907540" y="1351280"/>
             <a:ext cx="563118" cy="509524"/>
           </a:xfrm>
           <a:prstGeom prst="rect">
@@ -11746,7 +11746,7 @@
         </p:nvSpPr>
         <p:spPr>
           <a:xfrm>
-            <a:off x="1926844" y="1897380"/>
+            <a:off x="1944116" y="1897380"/>
             <a:ext cx="489966" cy="0"/>
           </a:xfrm>
           <a:prstGeom prst="line">
@@ -11769,7 +11769,7 @@
         </p:nvSpPr>
         <p:spPr>
           <a:xfrm>
-            <a:off x="1890268" y="1933956"/>
+            <a:off x="1907540" y="1933956"/>
             <a:ext cx="563118" cy="509524"/>
           </a:xfrm>
           <a:prstGeom prst="rect">
@@ -11808,7 +11808,7 @@
         </p:nvSpPr>
         <p:spPr>
           <a:xfrm>
-            <a:off x="2563114" y="1351280"/>
+            <a:off x="2580386" y="1351280"/>
             <a:ext cx="437388" cy="1092200"/>
           </a:xfrm>
           <a:prstGeom prst="rect">
@@ -11847,7 +11847,7 @@
         </p:nvSpPr>
         <p:spPr>
           <a:xfrm>
-            <a:off x="3261304" y="1708856"/>
+            <a:off x="3278576" y="1708856"/>
             <a:ext cx="377048" cy="377048"/>
           </a:xfrm>
           <a:prstGeom prst="rect">
@@ -13697,7 +13697,7 @@
         <p:spPr>
           <a:xfrm>
             <a:off x="1344168" y="2012696"/>
-            <a:ext cx="1059688" cy="912368"/>
+            <a:ext cx="1073912" cy="912368"/>
           </a:xfrm>
           <a:prstGeom prst="rect">
             <a:avLst/>
@@ -13735,7 +13735,7 @@
         </p:nvSpPr>
         <p:spPr>
           <a:xfrm>
-            <a:off x="2513584" y="2012696"/>
+            <a:off x="2527808" y="2012696"/>
             <a:ext cx="483108" cy="419608"/>
           </a:xfrm>
           <a:prstGeom prst="rect">
@@ -13774,7 +13774,7 @@
         </p:nvSpPr>
         <p:spPr>
           <a:xfrm>
-            <a:off x="2550160" y="2468880"/>
+            <a:off x="2564384" y="2468880"/>
             <a:ext cx="409956" cy="0"/>
           </a:xfrm>
           <a:prstGeom prst="line">
@@ -13797,7 +13797,7 @@
         </p:nvSpPr>
         <p:spPr>
           <a:xfrm>
-            <a:off x="2513584" y="2505456"/>
+            <a:off x="2527808" y="2505456"/>
             <a:ext cx="483108" cy="419608"/>
           </a:xfrm>
           <a:prstGeom prst="rect">
@@ -13836,7 +13836,7 @@
         </p:nvSpPr>
         <p:spPr>
           <a:xfrm>
-            <a:off x="3106420" y="2012696"/>
+            <a:off x="3120644" y="2012696"/>
             <a:ext cx="405384" cy="912368"/>
           </a:xfrm>
           <a:prstGeom prst="rect">
@@ -13875,7 +13875,7 @@
         </p:nvSpPr>
         <p:spPr>
           <a:xfrm>
-            <a:off x="3768537" y="2313625"/>
+            <a:off x="3782761" y="2313625"/>
             <a:ext cx="310510" cy="310510"/>
           </a:xfrm>
           <a:prstGeom prst="rect">
@@ -13948,7 +13948,7 @@
         <p:spPr>
           <a:xfrm>
             <a:off x="1344168" y="3109976"/>
-            <a:ext cx="1059688" cy="912368"/>
+            <a:ext cx="1073912" cy="912368"/>
           </a:xfrm>
           <a:prstGeom prst="rect">
             <a:avLst/>
@@ -13986,7 +13986,7 @@
         </p:nvSpPr>
         <p:spPr>
           <a:xfrm>
-            <a:off x="2513584" y="3109976"/>
+            <a:off x="2527808" y="3109976"/>
             <a:ext cx="483108" cy="419608"/>
           </a:xfrm>
           <a:prstGeom prst="rect">
@@ -14025,7 +14025,7 @@
         </p:nvSpPr>
         <p:spPr>
           <a:xfrm>
-            <a:off x="2550160" y="3566160"/>
+            <a:off x="2564384" y="3566160"/>
             <a:ext cx="409956" cy="0"/>
           </a:xfrm>
           <a:prstGeom prst="line">
@@ -14048,7 +14048,7 @@
         </p:nvSpPr>
         <p:spPr>
           <a:xfrm>
-            <a:off x="2513584" y="3602736"/>
+            <a:off x="2527808" y="3602736"/>
             <a:ext cx="483108" cy="419608"/>
           </a:xfrm>
           <a:prstGeom prst="rect">
@@ -14087,7 +14087,7 @@
         </p:nvSpPr>
         <p:spPr>
           <a:xfrm>
-            <a:off x="3106420" y="3109976"/>
+            <a:off x="3120644" y="3109976"/>
             <a:ext cx="405384" cy="912368"/>
           </a:xfrm>
           <a:prstGeom prst="rect">
@@ -14126,7 +14126,7 @@
         </p:nvSpPr>
         <p:spPr>
           <a:xfrm>
-            <a:off x="3768537" y="3410905"/>
+            <a:off x="3782761" y="3410905"/>
             <a:ext cx="310510" cy="310510"/>
           </a:xfrm>
           <a:prstGeom prst="rect">
@@ -14199,7 +14199,7 @@
         <p:spPr>
           <a:xfrm>
             <a:off x="1344168" y="4207256"/>
-            <a:ext cx="1059688" cy="912368"/>
+            <a:ext cx="1073912" cy="912368"/>
           </a:xfrm>
           <a:prstGeom prst="rect">
             <a:avLst/>
@@ -14237,7 +14237,7 @@
         </p:nvSpPr>
         <p:spPr>
           <a:xfrm>
-            <a:off x="2513584" y="4207256"/>
+            <a:off x="2527808" y="4207256"/>
             <a:ext cx="483108" cy="419608"/>
           </a:xfrm>
           <a:prstGeom prst="rect">
@@ -14276,7 +14276,7 @@
         </p:nvSpPr>
         <p:spPr>
           <a:xfrm>
-            <a:off x="2550160" y="4663440"/>
+            <a:off x="2564384" y="4663440"/>
             <a:ext cx="409956" cy="0"/>
           </a:xfrm>
           <a:prstGeom prst="line">
@@ -14299,7 +14299,7 @@
         </p:nvSpPr>
         <p:spPr>
           <a:xfrm>
-            <a:off x="2513584" y="4700016"/>
+            <a:off x="2527808" y="4700016"/>
             <a:ext cx="483108" cy="419608"/>
           </a:xfrm>
           <a:prstGeom prst="rect">
@@ -14338,7 +14338,7 @@
         </p:nvSpPr>
         <p:spPr>
           <a:xfrm>
-            <a:off x="3106420" y="4207256"/>
+            <a:off x="3120644" y="4207256"/>
             <a:ext cx="405384" cy="912368"/>
           </a:xfrm>
           <a:prstGeom prst="rect">
@@ -14377,7 +14377,7 @@
         </p:nvSpPr>
         <p:spPr>
           <a:xfrm>
-            <a:off x="3768537" y="4508185"/>
+            <a:off x="3782761" y="4508185"/>
             <a:ext cx="310510" cy="310510"/>
           </a:xfrm>
           <a:prstGeom prst="rect">
@@ -15551,7 +15551,7 @@
         <p:spPr>
           <a:xfrm>
             <a:off x="1344168" y="4391660"/>
-            <a:ext cx="1231900" cy="1092200"/>
+            <a:ext cx="1249172" cy="1092200"/>
           </a:xfrm>
           <a:prstGeom prst="rect">
             <a:avLst/>
@@ -15589,7 +15589,7 @@
         </p:nvSpPr>
         <p:spPr>
           <a:xfrm>
-            <a:off x="2685796" y="4391660"/>
+            <a:off x="2703068" y="4391660"/>
             <a:ext cx="563118" cy="509524"/>
           </a:xfrm>
           <a:prstGeom prst="rect">
@@ -15628,7 +15628,7 @@
         </p:nvSpPr>
         <p:spPr>
           <a:xfrm>
-            <a:off x="2722372" y="4937760"/>
+            <a:off x="2739644" y="4937760"/>
             <a:ext cx="489966" cy="0"/>
           </a:xfrm>
           <a:prstGeom prst="line">
@@ -15651,7 +15651,7 @@
         </p:nvSpPr>
         <p:spPr>
           <a:xfrm>
-            <a:off x="2685796" y="4974336"/>
+            <a:off x="2703068" y="4974336"/>
             <a:ext cx="563118" cy="509524"/>
           </a:xfrm>
           <a:prstGeom prst="rect">
@@ -15690,7 +15690,7 @@
         </p:nvSpPr>
         <p:spPr>
           <a:xfrm>
-            <a:off x="3358642" y="4391660"/>
+            <a:off x="3375914" y="4391660"/>
             <a:ext cx="437388" cy="1092200"/>
           </a:xfrm>
           <a:prstGeom prst="rect">
@@ -15729,7 +15729,7 @@
         </p:nvSpPr>
         <p:spPr>
           <a:xfrm>
-            <a:off x="4056832" y="4749236"/>
+            <a:off x="4074104" y="4749236"/>
             <a:ext cx="377048" cy="377048"/>
           </a:xfrm>
           <a:prstGeom prst="rect">
@@ -15802,7 +15802,7 @@
         <p:spPr>
           <a:xfrm>
             <a:off x="7072884" y="4391660"/>
-            <a:ext cx="1231900" cy="1092200"/>
+            <a:ext cx="1249172" cy="1092200"/>
           </a:xfrm>
           <a:prstGeom prst="rect">
             <a:avLst/>
@@ -15840,7 +15840,7 @@
         </p:nvSpPr>
         <p:spPr>
           <a:xfrm>
-            <a:off x="8414512" y="4391660"/>
+            <a:off x="8431784" y="4391660"/>
             <a:ext cx="563118" cy="509524"/>
           </a:xfrm>
           <a:prstGeom prst="rect">
@@ -15879,7 +15879,7 @@
         </p:nvSpPr>
         <p:spPr>
           <a:xfrm>
-            <a:off x="8451088" y="4937760"/>
+            <a:off x="8468360" y="4937760"/>
             <a:ext cx="489966" cy="0"/>
           </a:xfrm>
           <a:prstGeom prst="line">
@@ -15902,7 +15902,7 @@
         </p:nvSpPr>
         <p:spPr>
           <a:xfrm>
-            <a:off x="8414512" y="4974336"/>
+            <a:off x="8431784" y="4974336"/>
             <a:ext cx="563118" cy="509524"/>
           </a:xfrm>
           <a:prstGeom prst="rect">
@@ -15941,7 +15941,7 @@
         </p:nvSpPr>
         <p:spPr>
           <a:xfrm>
-            <a:off x="9087358" y="4391660"/>
+            <a:off x="9104630" y="4391660"/>
             <a:ext cx="437388" cy="1092200"/>
           </a:xfrm>
           <a:prstGeom prst="rect">
@@ -15980,7 +15980,7 @@
         </p:nvSpPr>
         <p:spPr>
           <a:xfrm>
-            <a:off x="9785548" y="4749236"/>
+            <a:off x="9802820" y="4749236"/>
             <a:ext cx="377048" cy="377048"/>
           </a:xfrm>
           <a:prstGeom prst="rect">

--- a/dist/초3/수학/분수와소수/초3_수학_분수와소수_04_묶음을분수로_학생용.pptx
+++ b/dist/초3/수학/분수와소수/초3_수학_분수와소수_04_묶음을분수로_학생용.pptx
@@ -118,44 +118,44 @@
   <p:extLst>
     <p:ext uri="{521415D9-36F7-43E2-AB2F-B90AF26B5E84}">
       <p14:sectionLst xmlns:p14="http://schemas.microsoft.com/office/powerpoint/2010/main">
-        <p14:section name="도입" id="{9c019ba4-4201-0205-8ddd-4fb645f13358}">
+        <p14:section name="도입" id="{9517343b-631f-970a-ccbe-503897149cc5}">
           <p14:sldIdLst>
             <p14:sldId id="256"/>
             <p14:sldId id="257"/>
           </p14:sldIdLst>
         </p14:section>
-        <p14:section name="개념" id="{b2fe34fa-af43-9011-87f6-f9394867176b}">
+        <p14:section name="개념" id="{0724b835-3f77-6ee7-24e1-7a397d9a0721}">
           <p14:sldIdLst>
             <p14:sldId id="258"/>
             <p14:sldId id="259"/>
             <p14:sldId id="262"/>
           </p14:sldIdLst>
         </p14:section>
-        <p14:section name="연습" id="{a05fe063-82ed-6ffe-3d10-fe8cc6857c37}">
+        <p14:section name="연습" id="{22d0c50d-fb86-398c-408e-888c0b1aa8f6}">
           <p14:sldIdLst>
             <p14:sldId id="260"/>
             <p14:sldId id="261"/>
             <p14:sldId id="263"/>
           </p14:sldIdLst>
         </p14:section>
-        <p14:section name="개념" id="{a94cf680-1a27-cd41-6b0d-1a69281b6940}">
+        <p14:section name="개념" id="{ad3b4762-8ed8-cc4d-902c-d38041525f3b}">
           <p14:sldIdLst/>
         </p14:section>
-        <p14:section name="연습" id="{e5e9935d-b506-5df7-b3b4-244349fe7c70}">
+        <p14:section name="연습" id="{fb225709-a8d5-b9c2-84b7-ea72e12e6ed8}">
           <p14:sldIdLst/>
         </p14:section>
-        <p14:section name="확인" id="{c1036004-fe99-dcf2-357a-934c789d3f9d}">
+        <p14:section name="확인" id="{d7426938-7920-76c1-3a26-6c4e4336faef}">
           <p14:sldIdLst>
             <p14:sldId id="264"/>
             <p14:sldId id="265"/>
           </p14:sldIdLst>
         </p14:section>
-        <p14:section name="정리" id="{19fa8b77-216a-ca2e-0bc9-422fdadaeaf8}">
+        <p14:section name="정리" id="{d36f6b9d-1cff-3e50-8a6a-ed11533fdecd}">
           <p14:sldIdLst>
             <p14:sldId id="266"/>
           </p14:sldIdLst>
         </p14:section>
-        <p14:section name="보충" id="{7eba4f26-c948-99c9-cfb3-4547bd43cb0a}">
+        <p14:section name="보충" id="{e7ff662d-13b6-57ff-b035-f512444f4d09}">
           <p14:sldIdLst>
             <p14:sldId id="267"/>
           </p14:sldIdLst>
